--- a/talks/Kolloq_Simulatenous_opposite_adaptation.pptx
+++ b/talks/Kolloq_Simulatenous_opposite_adaptation.pptx
@@ -2221,20 +2221,16 @@
               <a:buChar char="-"/>
             </a:pPr>
             <a:r>
+              <a:rPr lang="de-DE" dirty="0" err="1"/>
+              <a:t>Linguistic</a:t>
+            </a:r>
+            <a:r>
               <a:rPr lang="de-DE" dirty="0"/>
-              <a:t>Change </a:t>
+              <a:t>: </a:t>
             </a:r>
             <a:r>
               <a:rPr lang="de-DE" dirty="0" err="1"/>
-              <a:t>within</a:t>
-            </a:r>
-            <a:r>
-              <a:rPr lang="de-DE" dirty="0"/>
-              <a:t> an </a:t>
-            </a:r>
-            <a:r>
-              <a:rPr lang="de-DE" dirty="0" err="1"/>
-              <a:t>interactional</a:t>
+              <a:t>speech</a:t>
             </a:r>
             <a:r>
               <a:rPr lang="de-DE" dirty="0"/>
@@ -2242,26 +2238,176 @@
             </a:r>
             <a:r>
               <a:rPr lang="de-DE" dirty="0" err="1"/>
-              <a:t>context</a:t>
+              <a:t>sounds</a:t>
             </a:r>
             <a:r>
               <a:rPr lang="de-DE" dirty="0"/>
-              <a:t> </a:t>
+              <a:t>, </a:t>
             </a:r>
             <a:r>
               <a:rPr lang="de-DE" dirty="0" err="1"/>
-              <a:t>or</a:t>
+              <a:t>semantics</a:t>
             </a:r>
             <a:r>
               <a:rPr lang="de-DE" dirty="0"/>
-              <a:t> not</a:t>
-            </a:r>
+              <a:t>, but also </a:t>
+            </a:r>
+            <a:r>
+              <a:rPr lang="de-DE" dirty="0" err="1"/>
+              <a:t>phonetcs</a:t>
+            </a:r>
+            <a:endParaRPr lang="de-DE" dirty="0"/>
           </a:p>
           <a:p>
             <a:pPr marL="171450" indent="-171450">
               <a:buFontTx/>
               <a:buChar char="-"/>
             </a:pPr>
+            <a:r>
+              <a:rPr lang="de-DE" dirty="0"/>
+              <a:t>Change </a:t>
+            </a:r>
+            <a:r>
+              <a:rPr lang="de-DE" dirty="0" err="1"/>
+              <a:t>within</a:t>
+            </a:r>
+            <a:r>
+              <a:rPr lang="de-DE" dirty="0"/>
+              <a:t> an </a:t>
+            </a:r>
+            <a:r>
+              <a:rPr lang="de-DE" dirty="0" err="1"/>
+              <a:t>interactional</a:t>
+            </a:r>
+            <a:r>
+              <a:rPr lang="de-DE" dirty="0"/>
+              <a:t> </a:t>
+            </a:r>
+            <a:r>
+              <a:rPr lang="de-DE" dirty="0" err="1"/>
+              <a:t>context</a:t>
+            </a:r>
+            <a:r>
+              <a:rPr lang="de-DE" dirty="0"/>
+              <a:t> </a:t>
+            </a:r>
+            <a:r>
+              <a:rPr lang="de-DE" dirty="0" err="1"/>
+              <a:t>or</a:t>
+            </a:r>
+            <a:r>
+              <a:rPr lang="de-DE" dirty="0"/>
+              <a:t> not</a:t>
+            </a:r>
+          </a:p>
+          <a:p>
+            <a:pPr marL="171450" indent="-171450">
+              <a:buFontTx/>
+              <a:buChar char="-"/>
+            </a:pPr>
+            <a:r>
+              <a:rPr lang="de-DE" dirty="0" err="1"/>
+              <a:t>Extalinguistics</a:t>
+            </a:r>
+            <a:r>
+              <a:rPr lang="de-DE" dirty="0"/>
+              <a:t>: </a:t>
+            </a:r>
+            <a:r>
+              <a:rPr lang="de-DE" dirty="0" err="1"/>
+              <a:t>stable</a:t>
+            </a:r>
+            <a:r>
+              <a:rPr lang="de-DE" dirty="0"/>
+              <a:t> </a:t>
+            </a:r>
+            <a:r>
+              <a:rPr lang="de-DE" dirty="0" err="1"/>
+              <a:t>speaker</a:t>
+            </a:r>
+            <a:r>
+              <a:rPr lang="de-DE" dirty="0"/>
+              <a:t> </a:t>
+            </a:r>
+            <a:r>
+              <a:rPr lang="de-DE" dirty="0" err="1"/>
+              <a:t>characteristics</a:t>
+            </a:r>
+            <a:endParaRPr lang="de-DE" dirty="0"/>
+          </a:p>
+          <a:p>
+            <a:pPr marL="171450" indent="-171450">
+              <a:buFontTx/>
+              <a:buChar char="-"/>
+            </a:pPr>
+            <a:r>
+              <a:rPr lang="de-DE" dirty="0" err="1"/>
+              <a:t>Paralinguistic</a:t>
+            </a:r>
+            <a:r>
+              <a:rPr lang="de-DE" dirty="0"/>
+              <a:t>: </a:t>
+            </a:r>
+            <a:r>
+              <a:rPr lang="de-DE" dirty="0" err="1"/>
+              <a:t>unfold</a:t>
+            </a:r>
+            <a:r>
+              <a:rPr lang="de-DE" dirty="0"/>
+              <a:t> </a:t>
+            </a:r>
+            <a:r>
+              <a:rPr lang="de-DE" dirty="0" err="1"/>
+              <a:t>together</a:t>
+            </a:r>
+            <a:r>
+              <a:rPr lang="de-DE" dirty="0"/>
+              <a:t> </a:t>
+            </a:r>
+            <a:r>
+              <a:rPr lang="de-DE" dirty="0" err="1"/>
+              <a:t>with</a:t>
+            </a:r>
+            <a:r>
+              <a:rPr lang="de-DE" dirty="0"/>
+              <a:t> the </a:t>
+            </a:r>
+            <a:r>
+              <a:rPr lang="de-DE" dirty="0" err="1"/>
+              <a:t>linguistic</a:t>
+            </a:r>
+            <a:r>
+              <a:rPr lang="de-DE" dirty="0"/>
+              <a:t>, and </a:t>
+            </a:r>
+            <a:r>
+              <a:rPr lang="de-DE" dirty="0" err="1"/>
+              <a:t>they</a:t>
+            </a:r>
+            <a:r>
+              <a:rPr lang="de-DE" dirty="0"/>
+              <a:t> </a:t>
+            </a:r>
+            <a:r>
+              <a:rPr lang="de-DE" dirty="0" err="1"/>
+              <a:t>are</a:t>
+            </a:r>
+            <a:r>
+              <a:rPr lang="de-DE" dirty="0"/>
+              <a:t> </a:t>
+            </a:r>
+            <a:r>
+              <a:rPr lang="de-DE" dirty="0" err="1"/>
+              <a:t>dynamic</a:t>
+            </a:r>
+            <a:r>
+              <a:rPr lang="de-DE" dirty="0"/>
+              <a:t> as </a:t>
+            </a:r>
+            <a:r>
+              <a:rPr lang="de-DE" dirty="0" err="1"/>
+              <a:t>well</a:t>
+            </a:r>
             <a:endParaRPr lang="de-DE" dirty="0"/>
           </a:p>
         </p:txBody>
@@ -3527,11 +3673,11 @@
             </a:pPr>
             <a:r>
               <a:rPr lang="de-DE" dirty="0"/>
-              <a:t>Pick </a:t>
+              <a:t>„</a:t>
             </a:r>
             <a:r>
               <a:rPr lang="de-DE" dirty="0" err="1"/>
-              <a:t>them</a:t>
+              <a:t>natural</a:t>
             </a:r>
             <a:r>
               <a:rPr lang="de-DE" dirty="0"/>
@@ -3539,15 +3685,15 @@
             </a:r>
             <a:r>
               <a:rPr lang="de-DE" dirty="0" err="1"/>
-              <a:t>up</a:t>
+              <a:t>experts</a:t>
             </a:r>
             <a:r>
               <a:rPr lang="de-DE" dirty="0"/>
-              <a:t> and </a:t>
+              <a:t>“ -&gt; do </a:t>
             </a:r>
             <a:r>
               <a:rPr lang="de-DE" dirty="0" err="1"/>
-              <a:t>process</a:t>
+              <a:t>this</a:t>
             </a:r>
             <a:r>
               <a:rPr lang="de-DE" dirty="0"/>
@@ -3555,20 +3701,9 @@
             </a:r>
             <a:r>
               <a:rPr lang="de-DE" dirty="0" err="1"/>
-              <a:t>them</a:t>
-            </a:r>
-            <a:r>
-              <a:rPr lang="de-DE" dirty="0"/>
-              <a:t> </a:t>
-            </a:r>
-            <a:r>
-              <a:rPr lang="de-DE" dirty="0" err="1"/>
-              <a:t>very</a:t>
-            </a:r>
-            <a:r>
-              <a:rPr lang="de-DE" dirty="0"/>
-              <a:t> fast</a:t>
-            </a:r>
+              <a:t>automatically</a:t>
+            </a:r>
+            <a:endParaRPr lang="de-DE" dirty="0"/>
           </a:p>
           <a:p>
             <a:pPr marL="171450" indent="-171450">
@@ -3576,8 +3711,12 @@
               <a:buChar char="-"/>
             </a:pPr>
             <a:r>
+              <a:rPr lang="de-DE" dirty="0"/>
+              <a:t>Pick </a:t>
+            </a:r>
+            <a:r>
               <a:rPr lang="de-DE" dirty="0" err="1"/>
-              <a:t>They</a:t>
+              <a:t>them</a:t>
             </a:r>
             <a:r>
               <a:rPr lang="de-DE" dirty="0"/>
@@ -3585,23 +3724,15 @@
             </a:r>
             <a:r>
               <a:rPr lang="de-DE" dirty="0" err="1"/>
-              <a:t>can</a:t>
+              <a:t>up</a:t>
             </a:r>
             <a:r>
               <a:rPr lang="de-DE" dirty="0"/>
-              <a:t> change </a:t>
+              <a:t> and </a:t>
             </a:r>
             <a:r>
               <a:rPr lang="de-DE" dirty="0" err="1"/>
-              <a:t>within</a:t>
-            </a:r>
-            <a:r>
-              <a:rPr lang="de-DE" dirty="0"/>
-              <a:t> a </a:t>
-            </a:r>
-            <a:r>
-              <a:rPr lang="de-DE" dirty="0" err="1"/>
-              <a:t>few</a:t>
+              <a:t>process</a:t>
             </a:r>
             <a:r>
               <a:rPr lang="de-DE" dirty="0"/>
@@ -3609,9 +3740,20 @@
             </a:r>
             <a:r>
               <a:rPr lang="de-DE" dirty="0" err="1"/>
-              <a:t>seconds</a:t>
-            </a:r>
-            <a:endParaRPr lang="de-DE" dirty="0"/>
+              <a:t>them</a:t>
+            </a:r>
+            <a:r>
+              <a:rPr lang="de-DE" dirty="0"/>
+              <a:t> </a:t>
+            </a:r>
+            <a:r>
+              <a:rPr lang="de-DE" dirty="0" err="1"/>
+              <a:t>very</a:t>
+            </a:r>
+            <a:r>
+              <a:rPr lang="de-DE" dirty="0"/>
+              <a:t> fast</a:t>
+            </a:r>
           </a:p>
           <a:p>
             <a:pPr marL="171450" indent="-171450">
@@ -3619,20 +3761,8 @@
               <a:buChar char="-"/>
             </a:pPr>
             <a:r>
-              <a:rPr lang="de-DE" dirty="0"/>
-              <a:t>Real time </a:t>
-            </a:r>
-            <a:r>
               <a:rPr lang="de-DE" dirty="0" err="1"/>
-              <a:t>monitoring</a:t>
-            </a:r>
-            <a:r>
-              <a:rPr lang="de-DE" dirty="0"/>
-              <a:t> of the </a:t>
-            </a:r>
-            <a:r>
-              <a:rPr lang="de-DE" dirty="0" err="1"/>
-              <a:t>auditory</a:t>
+              <a:t>They</a:t>
             </a:r>
             <a:r>
               <a:rPr lang="de-DE" dirty="0"/>
@@ -3640,7 +3770,31 @@
             </a:r>
             <a:r>
               <a:rPr lang="de-DE" dirty="0" err="1"/>
-              <a:t>input</a:t>
+              <a:t>can</a:t>
+            </a:r>
+            <a:r>
+              <a:rPr lang="de-DE" dirty="0"/>
+              <a:t> change </a:t>
+            </a:r>
+            <a:r>
+              <a:rPr lang="de-DE" dirty="0" err="1"/>
+              <a:t>within</a:t>
+            </a:r>
+            <a:r>
+              <a:rPr lang="de-DE" dirty="0"/>
+              <a:t> a </a:t>
+            </a:r>
+            <a:r>
+              <a:rPr lang="de-DE" dirty="0" err="1"/>
+              <a:t>few</a:t>
+            </a:r>
+            <a:r>
+              <a:rPr lang="de-DE" dirty="0"/>
+              <a:t> </a:t>
+            </a:r>
+            <a:r>
+              <a:rPr lang="de-DE" dirty="0" err="1"/>
+              <a:t>seconds</a:t>
             </a:r>
             <a:endParaRPr lang="de-DE" dirty="0"/>
           </a:p>
@@ -3651,16 +3805,29 @@
             </a:pPr>
             <a:r>
               <a:rPr lang="de-DE" dirty="0"/>
-              <a:t>Very </a:t>
+              <a:t>Real time </a:t>
             </a:r>
             <a:r>
               <a:rPr lang="de-DE" dirty="0" err="1"/>
-              <a:t>tremendously</a:t>
+              <a:t>monitoring</a:t>
+            </a:r>
+            <a:r>
+              <a:rPr lang="de-DE" dirty="0"/>
+              <a:t> of the </a:t>
+            </a:r>
+            <a:r>
+              <a:rPr lang="de-DE" dirty="0" err="1"/>
+              <a:t>auditory</a:t>
             </a:r>
             <a:r>
               <a:rPr lang="de-DE" dirty="0"/>
               <a:t> </a:t>
             </a:r>
+            <a:r>
+              <a:rPr lang="de-DE" dirty="0" err="1"/>
+              <a:t>input</a:t>
+            </a:r>
+            <a:endParaRPr lang="de-DE" dirty="0"/>
           </a:p>
         </p:txBody>
       </p:sp>
@@ -4224,9 +4391,98 @@
           <a:bodyPr/>
           <a:lstStyle/>
           <a:p>
-            <a:pPr marL="0" indent="0">
+            <a:pPr marL="171450" indent="-171450">
               <a:buFontTx/>
-              <a:buNone/>
+              <a:buChar char="-"/>
+            </a:pPr>
+            <a:r>
+              <a:rPr lang="de-DE" dirty="0"/>
+              <a:t>Some </a:t>
+            </a:r>
+            <a:r>
+              <a:rPr lang="de-DE" dirty="0" err="1"/>
+              <a:t>sounds</a:t>
+            </a:r>
+            <a:r>
+              <a:rPr lang="de-DE" dirty="0"/>
+              <a:t> </a:t>
+            </a:r>
+            <a:r>
+              <a:rPr lang="de-DE" dirty="0" err="1"/>
+              <a:t>are</a:t>
+            </a:r>
+            <a:r>
+              <a:rPr lang="de-DE" dirty="0"/>
+              <a:t> </a:t>
+            </a:r>
+            <a:r>
+              <a:rPr lang="de-DE" dirty="0" err="1"/>
+              <a:t>much</a:t>
+            </a:r>
+            <a:r>
+              <a:rPr lang="de-DE" dirty="0"/>
+              <a:t> </a:t>
+            </a:r>
+            <a:r>
+              <a:rPr lang="de-DE" dirty="0" err="1"/>
+              <a:t>more</a:t>
+            </a:r>
+            <a:r>
+              <a:rPr lang="de-DE" dirty="0"/>
+              <a:t> </a:t>
+            </a:r>
+            <a:r>
+              <a:rPr lang="de-DE" dirty="0" err="1"/>
+              <a:t>efficient</a:t>
+            </a:r>
+            <a:r>
+              <a:rPr lang="de-DE" dirty="0"/>
+              <a:t> and </a:t>
+            </a:r>
+            <a:r>
+              <a:rPr lang="de-DE" dirty="0" err="1"/>
+              <a:t>satisfying</a:t>
+            </a:r>
+            <a:r>
+              <a:rPr lang="de-DE" dirty="0"/>
+              <a:t> </a:t>
+            </a:r>
+            <a:r>
+              <a:rPr lang="de-DE" dirty="0" err="1"/>
+              <a:t>when</a:t>
+            </a:r>
+            <a:r>
+              <a:rPr lang="de-DE" dirty="0"/>
+              <a:t> </a:t>
+            </a:r>
+            <a:r>
+              <a:rPr lang="de-DE" dirty="0" err="1"/>
+              <a:t>expressing</a:t>
+            </a:r>
+            <a:r>
+              <a:rPr lang="de-DE" dirty="0"/>
+              <a:t> </a:t>
+            </a:r>
+            <a:r>
+              <a:rPr lang="de-DE" dirty="0" err="1"/>
+              <a:t>anger</a:t>
+            </a:r>
+            <a:endParaRPr lang="de-DE" dirty="0"/>
+          </a:p>
+          <a:p>
+            <a:pPr marL="171450" indent="-171450">
+              <a:buFontTx/>
+              <a:buChar char="-"/>
+            </a:pPr>
+            <a:r>
+              <a:rPr lang="de-DE" dirty="0"/>
+              <a:t>Plosives</a:t>
+            </a:r>
+          </a:p>
+          <a:p>
+            <a:pPr marL="171450" indent="-171450">
+              <a:buFontTx/>
+              <a:buChar char="-"/>
             </a:pPr>
             <a:endParaRPr lang="de-DE" dirty="0"/>
           </a:p>
@@ -4889,6 +5145,107 @@
               <a:buChar char="-"/>
             </a:pPr>
             <a:r>
+              <a:rPr lang="de-DE" dirty="0"/>
+              <a:t>Not </a:t>
+            </a:r>
+            <a:r>
+              <a:rPr lang="de-DE" dirty="0" err="1"/>
+              <a:t>one</a:t>
+            </a:r>
+            <a:r>
+              <a:rPr lang="de-DE" dirty="0"/>
+              <a:t> exhaustive </a:t>
+            </a:r>
+            <a:r>
+              <a:rPr lang="de-DE" dirty="0" err="1"/>
+              <a:t>answer</a:t>
+            </a:r>
+            <a:r>
+              <a:rPr lang="de-DE" dirty="0"/>
+              <a:t> to </a:t>
+            </a:r>
+            <a:r>
+              <a:rPr lang="de-DE" dirty="0" err="1"/>
+              <a:t>this</a:t>
+            </a:r>
+            <a:r>
+              <a:rPr lang="de-DE" dirty="0"/>
+              <a:t> </a:t>
+            </a:r>
+            <a:r>
+              <a:rPr lang="de-DE" dirty="0" err="1"/>
+              <a:t>questions</a:t>
+            </a:r>
+            <a:endParaRPr lang="de-DE" dirty="0"/>
+          </a:p>
+          <a:p>
+            <a:pPr marL="171450" indent="-171450">
+              <a:buFontTx/>
+              <a:buChar char="-"/>
+            </a:pPr>
+            <a:r>
+              <a:rPr lang="de-DE" dirty="0"/>
+              <a:t>But </a:t>
+            </a:r>
+            <a:r>
+              <a:rPr lang="de-DE" dirty="0" err="1"/>
+              <a:t>one</a:t>
+            </a:r>
+            <a:r>
+              <a:rPr lang="de-DE" dirty="0"/>
+              <a:t> fundamental </a:t>
+            </a:r>
+            <a:r>
+              <a:rPr lang="de-DE" dirty="0" err="1"/>
+              <a:t>property</a:t>
+            </a:r>
+            <a:r>
+              <a:rPr lang="de-DE" dirty="0"/>
+              <a:t> of </a:t>
+            </a:r>
+            <a:r>
+              <a:rPr lang="de-DE" dirty="0" err="1"/>
+              <a:t>our</a:t>
+            </a:r>
+            <a:r>
+              <a:rPr lang="de-DE" dirty="0"/>
+              <a:t> </a:t>
+            </a:r>
+            <a:r>
+              <a:rPr lang="de-DE" dirty="0" err="1"/>
+              <a:t>perceptual</a:t>
+            </a:r>
+            <a:r>
+              <a:rPr lang="de-DE" dirty="0"/>
+              <a:t> </a:t>
+            </a:r>
+            <a:r>
+              <a:rPr lang="de-DE" dirty="0" err="1"/>
+              <a:t>system</a:t>
+            </a:r>
+            <a:r>
+              <a:rPr lang="de-DE" dirty="0"/>
+              <a:t>: </a:t>
+            </a:r>
+            <a:r>
+              <a:rPr lang="de-DE" dirty="0" err="1"/>
+              <a:t>flexibility</a:t>
+            </a:r>
+            <a:endParaRPr lang="de-DE" dirty="0"/>
+          </a:p>
+          <a:p>
+            <a:pPr marL="171450" indent="-171450">
+              <a:buFontTx/>
+              <a:buChar char="-"/>
+            </a:pPr>
+            <a:endParaRPr lang="de-DE" dirty="0"/>
+          </a:p>
+          <a:p>
+            <a:pPr marL="171450" indent="-171450">
+              <a:buFontTx/>
+              <a:buChar char="-"/>
+            </a:pPr>
+            <a:r>
               <a:rPr lang="de-DE" dirty="0" err="1"/>
               <a:t>We</a:t>
             </a:r>
@@ -5522,6 +5879,45 @@
               <a:buFontTx/>
               <a:buNone/>
             </a:pPr>
+            <a:r>
+              <a:rPr lang="de-DE" dirty="0"/>
+              <a:t>Powerful </a:t>
+            </a:r>
+            <a:r>
+              <a:rPr lang="de-DE" dirty="0" err="1"/>
+              <a:t>paradigm</a:t>
+            </a:r>
+            <a:r>
+              <a:rPr lang="de-DE" dirty="0"/>
+              <a:t>, to </a:t>
+            </a:r>
+            <a:r>
+              <a:rPr lang="de-DE" dirty="0" err="1"/>
+              <a:t>study</a:t>
+            </a:r>
+            <a:r>
+              <a:rPr lang="de-DE" dirty="0"/>
+              <a:t> </a:t>
+            </a:r>
+            <a:r>
+              <a:rPr lang="de-DE" dirty="0" err="1"/>
+              <a:t>this</a:t>
+            </a:r>
+            <a:r>
+              <a:rPr lang="de-DE" dirty="0"/>
+              <a:t> </a:t>
+            </a:r>
+            <a:r>
+              <a:rPr lang="de-DE" dirty="0" err="1"/>
+              <a:t>flexibility</a:t>
+            </a:r>
+            <a:endParaRPr lang="de-DE" dirty="0"/>
+          </a:p>
+          <a:p>
+            <a:pPr marL="0" indent="0">
+              <a:buFontTx/>
+              <a:buNone/>
+            </a:pPr>
             <a:endParaRPr lang="de-DE" dirty="0"/>
           </a:p>
         </p:txBody>
@@ -5718,6 +6114,87 @@
             </a:r>
             <a:endParaRPr lang="de-DE" dirty="0"/>
           </a:p>
+          <a:p>
+            <a:pPr marL="171450" indent="-171450">
+              <a:buFontTx/>
+              <a:buChar char="-"/>
+            </a:pPr>
+            <a:endParaRPr lang="de-DE" dirty="0"/>
+          </a:p>
+          <a:p>
+            <a:pPr marL="171450" indent="-171450">
+              <a:buFontTx/>
+              <a:buChar char="-"/>
+            </a:pPr>
+            <a:r>
+              <a:rPr lang="de-DE" dirty="0" err="1"/>
+              <a:t>One</a:t>
+            </a:r>
+            <a:r>
+              <a:rPr lang="de-DE" dirty="0"/>
+              <a:t> step </a:t>
+            </a:r>
+            <a:r>
+              <a:rPr lang="de-DE" dirty="0" err="1"/>
+              <a:t>further</a:t>
+            </a:r>
+            <a:r>
+              <a:rPr lang="de-DE" dirty="0"/>
+              <a:t> – and follow a </a:t>
+            </a:r>
+            <a:r>
+              <a:rPr lang="de-DE" dirty="0" err="1"/>
+              <a:t>recent</a:t>
+            </a:r>
+            <a:r>
+              <a:rPr lang="de-DE" dirty="0"/>
+              <a:t> </a:t>
+            </a:r>
+            <a:r>
+              <a:rPr lang="de-DE" dirty="0" err="1"/>
+              <a:t>call</a:t>
+            </a:r>
+            <a:r>
+              <a:rPr lang="de-DE" dirty="0"/>
+              <a:t> </a:t>
+            </a:r>
+            <a:r>
+              <a:rPr lang="de-DE" dirty="0" err="1"/>
+              <a:t>or</a:t>
+            </a:r>
+            <a:r>
+              <a:rPr lang="de-DE" dirty="0"/>
+              <a:t> </a:t>
+            </a:r>
+            <a:r>
+              <a:rPr lang="de-DE" dirty="0" err="1"/>
+              <a:t>better</a:t>
+            </a:r>
+            <a:r>
+              <a:rPr lang="de-DE" dirty="0"/>
+              <a:t> a </a:t>
+            </a:r>
+            <a:r>
+              <a:rPr lang="de-DE" dirty="0" err="1"/>
+              <a:t>line</a:t>
+            </a:r>
+            <a:r>
+              <a:rPr lang="de-DE" dirty="0"/>
+              <a:t> of </a:t>
+            </a:r>
+            <a:r>
+              <a:rPr lang="de-DE" dirty="0" err="1"/>
+              <a:t>thinking</a:t>
+            </a:r>
+            <a:endParaRPr lang="de-DE" dirty="0"/>
+          </a:p>
+          <a:p>
+            <a:pPr marL="171450" indent="-171450">
+              <a:buFontTx/>
+              <a:buChar char="-"/>
+            </a:pPr>
+            <a:endParaRPr lang="de-DE" dirty="0"/>
+          </a:p>
         </p:txBody>
       </p:sp>
       <p:sp>
@@ -5824,9 +6301,119 @@
           <a:bodyPr/>
           <a:lstStyle/>
           <a:p>
-            <a:pPr marL="0" indent="0">
+            <a:pPr marL="171450" indent="-171450">
               <a:buFontTx/>
-              <a:buNone/>
+              <a:buChar char="-"/>
+            </a:pPr>
+            <a:r>
+              <a:rPr lang="de-DE" dirty="0"/>
+              <a:t>For </a:t>
+            </a:r>
+            <a:r>
+              <a:rPr lang="de-DE" dirty="0" err="1"/>
+              <a:t>emotion</a:t>
+            </a:r>
+            <a:r>
+              <a:rPr lang="de-DE" dirty="0"/>
+              <a:t> </a:t>
+            </a:r>
+            <a:r>
+              <a:rPr lang="de-DE" dirty="0" err="1"/>
+              <a:t>processing</a:t>
+            </a:r>
+            <a:r>
+              <a:rPr lang="de-DE" dirty="0"/>
+              <a:t>, </a:t>
+            </a:r>
+            <a:r>
+              <a:rPr lang="de-DE" dirty="0" err="1"/>
+              <a:t>our</a:t>
+            </a:r>
+            <a:r>
+              <a:rPr lang="de-DE" dirty="0"/>
+              <a:t> </a:t>
+            </a:r>
+            <a:r>
+              <a:rPr lang="de-DE" dirty="0" err="1"/>
+              <a:t>perceptual</a:t>
+            </a:r>
+            <a:r>
+              <a:rPr lang="de-DE" dirty="0"/>
+              <a:t> </a:t>
+            </a:r>
+            <a:r>
+              <a:rPr lang="de-DE" dirty="0" err="1"/>
+              <a:t>system</a:t>
+            </a:r>
+            <a:r>
+              <a:rPr lang="de-DE" dirty="0"/>
+              <a:t> </a:t>
+            </a:r>
+            <a:r>
+              <a:rPr lang="de-DE" dirty="0" err="1"/>
+              <a:t>incorporates</a:t>
+            </a:r>
+            <a:r>
+              <a:rPr lang="de-DE" dirty="0"/>
+              <a:t> </a:t>
+            </a:r>
+            <a:r>
+              <a:rPr lang="de-DE" dirty="0" err="1"/>
+              <a:t>speaker</a:t>
+            </a:r>
+            <a:r>
+              <a:rPr lang="de-DE" dirty="0"/>
+              <a:t> </a:t>
+            </a:r>
+            <a:r>
+              <a:rPr lang="de-DE" dirty="0" err="1"/>
+              <a:t>characteristics</a:t>
+            </a:r>
+            <a:endParaRPr lang="de-DE" dirty="0"/>
+          </a:p>
+          <a:p>
+            <a:pPr marL="171450" indent="-171450">
+              <a:buFontTx/>
+              <a:buChar char="-"/>
+            </a:pPr>
+            <a:r>
+              <a:rPr lang="de-DE" dirty="0"/>
+              <a:t>Informative </a:t>
+            </a:r>
+            <a:r>
+              <a:rPr lang="de-DE" dirty="0" err="1"/>
+              <a:t>rather</a:t>
+            </a:r>
+            <a:r>
+              <a:rPr lang="de-DE" dirty="0"/>
+              <a:t> </a:t>
+            </a:r>
+            <a:r>
+              <a:rPr lang="de-DE" dirty="0" err="1"/>
+              <a:t>than</a:t>
+            </a:r>
+            <a:r>
+              <a:rPr lang="de-DE" dirty="0"/>
+              <a:t> </a:t>
+            </a:r>
+            <a:r>
+              <a:rPr lang="de-DE" dirty="0" err="1"/>
+              <a:t>treated</a:t>
+            </a:r>
+            <a:r>
+              <a:rPr lang="de-DE" dirty="0"/>
+              <a:t> as </a:t>
+            </a:r>
+            <a:r>
+              <a:rPr lang="de-DE" dirty="0" err="1"/>
+              <a:t>noise</a:t>
+            </a:r>
+            <a:endParaRPr lang="de-DE" dirty="0"/>
+          </a:p>
+          <a:p>
+            <a:pPr marL="171450" indent="-171450">
+              <a:buFontTx/>
+              <a:buChar char="-"/>
             </a:pPr>
             <a:endParaRPr lang="de-DE" dirty="0"/>
           </a:p>
@@ -5940,6 +6527,86 @@
               <a:buFontTx/>
               <a:buNone/>
             </a:pPr>
+            <a:r>
+              <a:rPr lang="de-DE" dirty="0"/>
+              <a:t>Processing -&gt; </a:t>
+            </a:r>
+            <a:r>
+              <a:rPr lang="de-DE" dirty="0" err="1"/>
+              <a:t>calibration</a:t>
+            </a:r>
+            <a:r>
+              <a:rPr lang="de-DE" dirty="0"/>
+              <a:t> </a:t>
+            </a:r>
+            <a:r>
+              <a:rPr lang="de-DE" dirty="0" err="1"/>
+              <a:t>process</a:t>
+            </a:r>
+            <a:r>
+              <a:rPr lang="de-DE" dirty="0"/>
+              <a:t>, </a:t>
+            </a:r>
+            <a:r>
+              <a:rPr lang="de-DE" dirty="0" err="1"/>
+              <a:t>this</a:t>
+            </a:r>
+            <a:r>
+              <a:rPr lang="de-DE" dirty="0"/>
+              <a:t> </a:t>
+            </a:r>
+            <a:r>
+              <a:rPr lang="de-DE" dirty="0" err="1"/>
+              <a:t>fine</a:t>
+            </a:r>
+            <a:r>
+              <a:rPr lang="de-DE" dirty="0"/>
+              <a:t> </a:t>
+            </a:r>
+            <a:r>
+              <a:rPr lang="de-DE" dirty="0" err="1"/>
+              <a:t>tuning</a:t>
+            </a:r>
+            <a:r>
+              <a:rPr lang="de-DE" dirty="0"/>
+              <a:t> </a:t>
+            </a:r>
+            <a:r>
+              <a:rPr lang="de-DE" dirty="0" err="1"/>
+              <a:t>that</a:t>
+            </a:r>
+            <a:r>
+              <a:rPr lang="de-DE" dirty="0"/>
+              <a:t> </a:t>
+            </a:r>
+            <a:r>
+              <a:rPr lang="de-DE" dirty="0" err="1"/>
+              <a:t>we</a:t>
+            </a:r>
+            <a:r>
+              <a:rPr lang="de-DE" dirty="0"/>
+              <a:t> </a:t>
+            </a:r>
+            <a:r>
+              <a:rPr lang="de-DE" dirty="0" err="1"/>
+              <a:t>see</a:t>
+            </a:r>
+            <a:r>
+              <a:rPr lang="de-DE" dirty="0"/>
+              <a:t> in </a:t>
+            </a:r>
+            <a:r>
+              <a:rPr lang="de-DE" dirty="0" err="1"/>
+              <a:t>perceptual</a:t>
+            </a:r>
+            <a:r>
+              <a:rPr lang="de-DE" dirty="0"/>
+              <a:t> </a:t>
+            </a:r>
+            <a:r>
+              <a:rPr lang="de-DE" dirty="0" err="1"/>
+              <a:t>adaptation</a:t>
+            </a:r>
             <a:endParaRPr lang="de-DE" dirty="0"/>
           </a:p>
         </p:txBody>
@@ -6047,6 +6714,69 @@
         <p:txBody>
           <a:bodyPr/>
           <a:lstStyle/>
+          <a:p>
+            <a:pPr marL="0" indent="0">
+              <a:buFontTx/>
+              <a:buNone/>
+            </a:pPr>
+            <a:r>
+              <a:rPr lang="de-DE" dirty="0"/>
+              <a:t>Fine </a:t>
+            </a:r>
+            <a:r>
+              <a:rPr lang="de-DE" dirty="0" err="1"/>
+              <a:t>tuning</a:t>
+            </a:r>
+            <a:r>
+              <a:rPr lang="de-DE" dirty="0"/>
+              <a:t>-&gt; </a:t>
+            </a:r>
+            <a:r>
+              <a:rPr lang="de-DE" dirty="0" err="1"/>
+              <a:t>makes</a:t>
+            </a:r>
+            <a:r>
+              <a:rPr lang="de-DE" dirty="0"/>
+              <a:t> the </a:t>
+            </a:r>
+            <a:r>
+              <a:rPr lang="de-DE" dirty="0" err="1"/>
+              <a:t>system</a:t>
+            </a:r>
+            <a:r>
+              <a:rPr lang="de-DE" dirty="0"/>
+              <a:t> </a:t>
+            </a:r>
+            <a:r>
+              <a:rPr lang="de-DE" dirty="0" err="1"/>
+              <a:t>more</a:t>
+            </a:r>
+            <a:r>
+              <a:rPr lang="de-DE" dirty="0"/>
+              <a:t> </a:t>
+            </a:r>
+            <a:r>
+              <a:rPr lang="de-DE" dirty="0" err="1"/>
+              <a:t>effective</a:t>
+            </a:r>
+            <a:r>
+              <a:rPr lang="de-DE" dirty="0"/>
+              <a:t>, </a:t>
+            </a:r>
+            <a:r>
+              <a:rPr lang="de-DE" dirty="0" err="1"/>
+              <a:t>tracking</a:t>
+            </a:r>
+            <a:r>
+              <a:rPr lang="de-DE" dirty="0"/>
+              <a:t> of </a:t>
+            </a:r>
+            <a:r>
+              <a:rPr lang="de-DE" dirty="0" err="1"/>
+              <a:t>emotions</a:t>
+            </a:r>
+            <a:endParaRPr lang="de-DE" dirty="0"/>
+          </a:p>
           <a:p>
             <a:pPr marL="0" indent="0">
               <a:buFontTx/>
